--- a/report/midterm PPT.pptx
+++ b/report/midterm PPT.pptx
@@ -564,8 +564,44 @@
               <a:t>《</a:t>
             </a:r>
             <a:r>
-              <a:rPr lang="zh-CN" altLang="en-US" dirty="0"/>
-              <a:t>题目</a:t>
+              <a:rPr lang="zh-CN" altLang="en-US" dirty="0">
+                <a:latin typeface="微软雅黑" panose="020B0503020204020204" charset="-122"/>
+                <a:ea typeface="微软雅黑" panose="020B0503020204020204" charset="-122"/>
+                <a:sym typeface="+mn-ea"/>
+              </a:rPr>
+              <a:t>基于</a:t>
+            </a:r>
+            <a:r>
+              <a:rPr lang="en-US" altLang="zh-CN" dirty="0">
+                <a:latin typeface="微软雅黑" panose="020B0503020204020204" charset="-122"/>
+                <a:ea typeface="微软雅黑" panose="020B0503020204020204" charset="-122"/>
+                <a:sym typeface="+mn-ea"/>
+              </a:rPr>
+              <a:t>EDA</a:t>
+            </a:r>
+            <a:r>
+              <a:rPr lang="zh-CN" altLang="en-US" dirty="0">
+                <a:latin typeface="微软雅黑" panose="020B0503020204020204" charset="-122"/>
+                <a:ea typeface="微软雅黑" panose="020B0503020204020204" charset="-122"/>
+                <a:sym typeface="+mn-ea"/>
+              </a:rPr>
+              <a:t>工具反馈的</a:t>
+            </a:r>
+            <a:r>
+              <a:rPr lang="en-US" altLang="zh-CN" dirty="0">
+                <a:latin typeface="微软雅黑" panose="020B0503020204020204" charset="-122"/>
+                <a:ea typeface="微软雅黑" panose="020B0503020204020204" charset="-122"/>
+                <a:sym typeface="+mn-ea"/>
+              </a:rPr>
+              <a:t>LLM Verilog</a:t>
+            </a:r>
+            <a:r>
+              <a:rPr lang="zh-CN" altLang="en-US" dirty="0">
+                <a:latin typeface="微软雅黑" panose="020B0503020204020204" charset="-122"/>
+                <a:ea typeface="微软雅黑" panose="020B0503020204020204" charset="-122"/>
+                <a:sym typeface="+mn-ea"/>
+              </a:rPr>
+              <a:t>生成与自动优化</a:t>
             </a:r>
             <a:r>
               <a:rPr lang="en-US" altLang="zh-CN" dirty="0"/>
@@ -573,7 +609,7 @@
             </a:r>
             <a:r>
               <a:rPr lang="zh-CN" altLang="en-US" dirty="0"/>
-              <a:t>。大家可能注意到我这个题目跟开题时不完全一致，是因为原先那个题目一开始是有源码的，所以即使工作量大我一个本科生也可以尝试。但是后来访问源码仓库时发现源码不存在了，所以只能放弃那个题目。现在这个题目是我和王锐老师商量改的，主要研究内容跟原先题目也是强关联的，依然是智能体与芯片设计。</a:t>
+              <a:t>。大家可能注意到我这个题目跟开题时不完全一致，是因为原先那个题目一开始是有源码的，所以即使工作量大我一个本科生也可以尝试。但是后来访问源码仓库时发现源码不存在了，所以只能放弃那个题目。现在这个题目是我和王锐老师商量改的，主要研究内容跟原先题目也是强关联的，甚至就是原先题目的一部分，依然是智能体与芯片设计的交叉领域。</a:t>
             </a:r>
             <a:endParaRPr lang="zh-CN" altLang="en-US" dirty="0"/>
           </a:p>
@@ -6998,6 +7034,211 @@
               </a:rPr>
               <a:t>）协调以上所有组件，实现完整的迭代优化流程。</a:t>
             </a:r>
+            <a:endParaRPr lang="zh-CN" altLang="en-US" dirty="0">
+              <a:latin typeface="微软雅黑" panose="020B0503020204020204" charset="-122"/>
+              <a:ea typeface="微软雅黑" panose="020B0503020204020204" charset="-122"/>
+              <a:sym typeface="+mn-ea"/>
+            </a:endParaRPr>
+          </a:p>
+          <a:p>
+            <a:pPr marL="0" indent="0">
+              <a:lnSpc>
+                <a:spcPct val="150000"/>
+              </a:lnSpc>
+              <a:spcBef>
+                <a:spcPts val="0"/>
+              </a:spcBef>
+              <a:spcAft>
+                <a:spcPts val="0"/>
+              </a:spcAft>
+              <a:buNone/>
+            </a:pPr>
+            <a:r>
+              <a:rPr lang="zh-CN" altLang="en-US" dirty="0">
+                <a:latin typeface="微软雅黑" panose="020B0503020204020204" charset="-122"/>
+                <a:ea typeface="微软雅黑" panose="020B0503020204020204" charset="-122"/>
+                <a:sym typeface="+mn-ea"/>
+              </a:rPr>
+              <a:t>系统以</a:t>
+            </a:r>
+            <a:r>
+              <a:rPr lang="en-US" altLang="zh-CN" dirty="0">
+                <a:latin typeface="微软雅黑" panose="020B0503020204020204" charset="-122"/>
+                <a:ea typeface="微软雅黑" panose="020B0503020204020204" charset="-122"/>
+                <a:sym typeface="+mn-ea"/>
+              </a:rPr>
+              <a:t> VerilogEval-Human </a:t>
+            </a:r>
+            <a:r>
+              <a:rPr lang="zh-CN" altLang="en-US" dirty="0">
+                <a:latin typeface="微软雅黑" panose="020B0503020204020204" charset="-122"/>
+                <a:ea typeface="微软雅黑" panose="020B0503020204020204" charset="-122"/>
+                <a:sym typeface="+mn-ea"/>
+              </a:rPr>
+              <a:t>基准测试集作为任务输入，经任务加载器读取后，由提示词构建器生成零样本提示词或反馈提示词，发送至</a:t>
+            </a:r>
+            <a:r>
+              <a:rPr lang="en-US" altLang="zh-CN" dirty="0">
+                <a:latin typeface="微软雅黑" panose="020B0503020204020204" charset="-122"/>
+                <a:ea typeface="微软雅黑" panose="020B0503020204020204" charset="-122"/>
+                <a:sym typeface="+mn-ea"/>
+              </a:rPr>
+              <a:t> LLM </a:t>
+            </a:r>
+            <a:r>
+              <a:rPr lang="zh-CN" altLang="en-US" dirty="0">
+                <a:latin typeface="微软雅黑" panose="020B0503020204020204" charset="-122"/>
+                <a:ea typeface="微软雅黑" panose="020B0503020204020204" charset="-122"/>
+                <a:sym typeface="+mn-ea"/>
+              </a:rPr>
+              <a:t>客户端调用</a:t>
+            </a:r>
+            <a:r>
+              <a:rPr lang="en-US" altLang="zh-CN" dirty="0">
+                <a:latin typeface="微软雅黑" panose="020B0503020204020204" charset="-122"/>
+                <a:ea typeface="微软雅黑" panose="020B0503020204020204" charset="-122"/>
+                <a:sym typeface="+mn-ea"/>
+              </a:rPr>
+              <a:t> Anthropic Claude API</a:t>
+            </a:r>
+            <a:r>
+              <a:rPr lang="zh-CN" altLang="en-US" dirty="0">
+                <a:latin typeface="微软雅黑" panose="020B0503020204020204" charset="-122"/>
+                <a:ea typeface="微软雅黑" panose="020B0503020204020204" charset="-122"/>
+                <a:sym typeface="+mn-ea"/>
+              </a:rPr>
+              <a:t>。</a:t>
+            </a:r>
+            <a:r>
+              <a:rPr lang="en-US" altLang="zh-CN" dirty="0">
+                <a:latin typeface="微软雅黑" panose="020B0503020204020204" charset="-122"/>
+                <a:ea typeface="微软雅黑" panose="020B0503020204020204" charset="-122"/>
+                <a:sym typeface="+mn-ea"/>
+              </a:rPr>
+              <a:t>LLM </a:t>
+            </a:r>
+            <a:r>
+              <a:rPr lang="zh-CN" altLang="en-US" dirty="0">
+                <a:latin typeface="微软雅黑" panose="020B0503020204020204" charset="-122"/>
+                <a:ea typeface="微软雅黑" panose="020B0503020204020204" charset="-122"/>
+                <a:sym typeface="+mn-ea"/>
+              </a:rPr>
+              <a:t>返回的原始响应经</a:t>
+            </a:r>
+            <a:r>
+              <a:rPr lang="en-US" altLang="zh-CN" dirty="0">
+                <a:latin typeface="微软雅黑" panose="020B0503020204020204" charset="-122"/>
+                <a:ea typeface="微软雅黑" panose="020B0503020204020204" charset="-122"/>
+                <a:sym typeface="+mn-ea"/>
+              </a:rPr>
+              <a:t> Verilog </a:t>
+            </a:r>
+            <a:r>
+              <a:rPr lang="zh-CN" altLang="en-US" dirty="0">
+                <a:latin typeface="微软雅黑" panose="020B0503020204020204" charset="-122"/>
+                <a:ea typeface="微软雅黑" panose="020B0503020204020204" charset="-122"/>
+                <a:sym typeface="+mn-ea"/>
+              </a:rPr>
+              <a:t>提取器提取代码块后，依次送入</a:t>
+            </a:r>
+            <a:r>
+              <a:rPr lang="en-US" altLang="zh-CN" dirty="0">
+                <a:latin typeface="微软雅黑" panose="020B0503020204020204" charset="-122"/>
+                <a:ea typeface="微软雅黑" panose="020B0503020204020204" charset="-122"/>
+                <a:sym typeface="+mn-ea"/>
+              </a:rPr>
+              <a:t> iverilog </a:t>
+            </a:r>
+            <a:r>
+              <a:rPr lang="zh-CN" altLang="en-US" dirty="0">
+                <a:latin typeface="微软雅黑" panose="020B0503020204020204" charset="-122"/>
+                <a:ea typeface="微软雅黑" panose="020B0503020204020204" charset="-122"/>
+                <a:sym typeface="+mn-ea"/>
+              </a:rPr>
+              <a:t>编译器和</a:t>
+            </a:r>
+            <a:r>
+              <a:rPr lang="en-US" altLang="zh-CN" dirty="0">
+                <a:latin typeface="微软雅黑" panose="020B0503020204020204" charset="-122"/>
+                <a:ea typeface="微软雅黑" panose="020B0503020204020204" charset="-122"/>
+                <a:sym typeface="+mn-ea"/>
+              </a:rPr>
+              <a:t> vvp </a:t>
+            </a:r>
+            <a:r>
+              <a:rPr lang="zh-CN" altLang="en-US" dirty="0">
+                <a:latin typeface="微软雅黑" panose="020B0503020204020204" charset="-122"/>
+                <a:ea typeface="微软雅黑" panose="020B0503020204020204" charset="-122"/>
+                <a:sym typeface="+mn-ea"/>
+              </a:rPr>
+              <a:t>仿真器进行验证。评分器根据仿真匹配率计算连续评分，反馈循环控制器根据评分结果决定是否构造</a:t>
+            </a:r>
+            <a:r>
+              <a:rPr lang="en-US" altLang="zh-CN" dirty="0">
+                <a:latin typeface="微软雅黑" panose="020B0503020204020204" charset="-122"/>
+                <a:ea typeface="微软雅黑" panose="020B0503020204020204" charset="-122"/>
+                <a:sym typeface="+mn-ea"/>
+              </a:rPr>
+              <a:t> succinct feedback </a:t>
+            </a:r>
+            <a:r>
+              <a:rPr lang="zh-CN" altLang="en-US" dirty="0">
+                <a:latin typeface="微软雅黑" panose="020B0503020204020204" charset="-122"/>
+                <a:ea typeface="微软雅黑" panose="020B0503020204020204" charset="-122"/>
+                <a:sym typeface="+mn-ea"/>
+              </a:rPr>
+              <a:t>提示词进入下一轮迭代修复。整个流程形成完整的生成</a:t>
+            </a:r>
+            <a:r>
+              <a:rPr lang="en-US" altLang="zh-CN" dirty="0">
+                <a:latin typeface="微软雅黑" panose="020B0503020204020204" charset="-122"/>
+                <a:ea typeface="微软雅黑" panose="020B0503020204020204" charset="-122"/>
+                <a:sym typeface="+mn-ea"/>
+              </a:rPr>
+              <a:t>—</a:t>
+            </a:r>
+            <a:r>
+              <a:rPr lang="zh-CN" altLang="en-US" dirty="0">
+                <a:latin typeface="微软雅黑" panose="020B0503020204020204" charset="-122"/>
+                <a:ea typeface="微软雅黑" panose="020B0503020204020204" charset="-122"/>
+                <a:sym typeface="+mn-ea"/>
+              </a:rPr>
+              <a:t>验证</a:t>
+            </a:r>
+            <a:r>
+              <a:rPr lang="en-US" altLang="zh-CN" dirty="0">
+                <a:latin typeface="微软雅黑" panose="020B0503020204020204" charset="-122"/>
+                <a:ea typeface="微软雅黑" panose="020B0503020204020204" charset="-122"/>
+                <a:sym typeface="+mn-ea"/>
+              </a:rPr>
+              <a:t>—</a:t>
+            </a:r>
+            <a:r>
+              <a:rPr lang="zh-CN" altLang="en-US" dirty="0">
+                <a:latin typeface="微软雅黑" panose="020B0503020204020204" charset="-122"/>
+                <a:ea typeface="微软雅黑" panose="020B0503020204020204" charset="-122"/>
+                <a:sym typeface="+mn-ea"/>
+              </a:rPr>
+              <a:t>反馈闭环。</a:t>
+            </a:r>
+            <a:endParaRPr lang="zh-CN" altLang="en-US" dirty="0">
+              <a:latin typeface="微软雅黑" panose="020B0503020204020204" charset="-122"/>
+              <a:ea typeface="微软雅黑" panose="020B0503020204020204" charset="-122"/>
+            </a:endParaRPr>
+          </a:p>
+          <a:p>
+            <a:pPr marL="0" indent="0">
+              <a:lnSpc>
+                <a:spcPct val="150000"/>
+              </a:lnSpc>
+              <a:spcBef>
+                <a:spcPts val="0"/>
+              </a:spcBef>
+              <a:spcAft>
+                <a:spcPts val="0"/>
+              </a:spcAft>
+              <a:buNone/>
+            </a:pPr>
             <a:endParaRPr lang="zh-CN" altLang="en-US" sz="1200" dirty="0">
               <a:latin typeface="微软雅黑" panose="020B0503020204020204" charset="-122"/>
               <a:ea typeface="微软雅黑" panose="020B0503020204020204" charset="-122"/>
@@ -10408,7 +10649,7 @@
                 <a:latin typeface="微软雅黑" panose="020B0503020204020204" charset="-122"/>
                 <a:ea typeface="微软雅黑" panose="020B0503020204020204" charset="-122"/>
               </a:rPr>
-              <a:t>生成自动优化</a:t>
+              <a:t>生成与自动优化</a:t>
             </a:r>
             <a:endParaRPr lang="zh-CN" altLang="en-US" dirty="0">
               <a:latin typeface="微软雅黑" panose="020B0503020204020204" charset="-122"/>
@@ -22941,6 +23182,20 @@
                 <a:ea typeface="微软雅黑" panose="020B0503020204020204" charset="-122"/>
               </a:rPr>
               <a:t>课题总体任务概述</a:t>
+            </a:r>
+            <a:r>
+              <a:rPr lang="en-US" altLang="zh-CN" sz="2800" dirty="0">
+                <a:latin typeface="微软雅黑" panose="020B0503020204020204" charset="-122"/>
+                <a:ea typeface="微软雅黑" panose="020B0503020204020204" charset="-122"/>
+              </a:rPr>
+              <a:t>-</a:t>
+            </a:r>
+            <a:r>
+              <a:rPr sz="2800" dirty="0">
+                <a:latin typeface="微软雅黑" panose="020B0503020204020204" charset="-122"/>
+                <a:ea typeface="微软雅黑" panose="020B0503020204020204" charset="-122"/>
+              </a:rPr>
+              <a:t>背景与切入</a:t>
             </a:r>
             <a:endParaRPr lang="en-US" altLang="zh-CN" sz="2800" dirty="0">
               <a:latin typeface="微软雅黑" panose="020B0503020204020204" charset="-122"/>
@@ -39405,7 +39660,7 @@
       </p:sp>
       <p:pic>
         <p:nvPicPr>
-          <p:cNvPr id="8" name="图片 7"/>
+          <p:cNvPr id="6" name="图片 6" descr="fig_feedback_loop_flow"/>
           <p:cNvPicPr>
             <a:picLocks noChangeAspect="1"/>
           </p:cNvPicPr>
@@ -39419,8 +39674,8 @@
         </p:blipFill>
         <p:spPr>
           <a:xfrm>
-            <a:off x="6208395" y="1704340"/>
-            <a:ext cx="4254500" cy="2616200"/>
+            <a:off x="6170295" y="1062990"/>
+            <a:ext cx="4136390" cy="5704840"/>
           </a:xfrm>
           <a:prstGeom prst="rect">
             <a:avLst/>
@@ -39948,7 +40203,7 @@
         <p:spPr>
           <a:xfrm>
             <a:off x="383540" y="1082040"/>
-            <a:ext cx="7440295" cy="5654040"/>
+            <a:ext cx="6552565" cy="5654040"/>
           </a:xfrm>
         </p:spPr>
         <p:txBody>
@@ -40306,6 +40561,40 @@
               </a:rPr>
               <a:t>）</a:t>
             </a:r>
+            <a:endParaRPr lang="en-US" altLang="zh-CN" sz="1600" dirty="0">
+              <a:latin typeface="微软雅黑" panose="020B0503020204020204" charset="-122"/>
+              <a:ea typeface="微软雅黑" panose="020B0503020204020204" charset="-122"/>
+            </a:endParaRPr>
+          </a:p>
+          <a:p>
+            <a:pPr marL="0" indent="0">
+              <a:lnSpc>
+                <a:spcPct val="150000"/>
+              </a:lnSpc>
+              <a:spcBef>
+                <a:spcPts val="0"/>
+              </a:spcBef>
+              <a:spcAft>
+                <a:spcPts val="0"/>
+              </a:spcAft>
+            </a:pPr>
+            <a:endParaRPr lang="en-US" altLang="zh-CN" sz="1600" dirty="0">
+              <a:latin typeface="微软雅黑" panose="020B0503020204020204" charset="-122"/>
+              <a:ea typeface="微软雅黑" panose="020B0503020204020204" charset="-122"/>
+            </a:endParaRPr>
+          </a:p>
+          <a:p>
+            <a:pPr marL="0" indent="0">
+              <a:lnSpc>
+                <a:spcPct val="150000"/>
+              </a:lnSpc>
+              <a:spcBef>
+                <a:spcPts val="0"/>
+              </a:spcBef>
+              <a:spcAft>
+                <a:spcPts val="0"/>
+              </a:spcAft>
+            </a:pPr>
             <a:endParaRPr lang="zh-CN" altLang="en-US" sz="1600" dirty="0">
               <a:latin typeface="微软雅黑" panose="020B0503020204020204" charset="-122"/>
               <a:ea typeface="微软雅黑" panose="020B0503020204020204" charset="-122"/>
@@ -40323,6 +40612,23 @@
                 <a:spcPts val="0"/>
               </a:spcAft>
             </a:pPr>
+            <a:endParaRPr lang="zh-CN" altLang="en-US" sz="1600" dirty="0">
+              <a:latin typeface="微软雅黑" panose="020B0503020204020204" charset="-122"/>
+              <a:ea typeface="微软雅黑" panose="020B0503020204020204" charset="-122"/>
+            </a:endParaRPr>
+          </a:p>
+          <a:p>
+            <a:pPr marL="0" indent="0">
+              <a:lnSpc>
+                <a:spcPct val="150000"/>
+              </a:lnSpc>
+              <a:spcBef>
+                <a:spcPts val="0"/>
+              </a:spcBef>
+              <a:spcAft>
+                <a:spcPts val="0"/>
+              </a:spcAft>
+            </a:pPr>
             <a:r>
               <a:rPr lang="en-US" altLang="zh-CN" sz="1600" dirty="0">
                 <a:latin typeface="微软雅黑" panose="020B0503020204020204" charset="-122"/>
@@ -40335,133 +40641,42 @@
                 <a:latin typeface="微软雅黑" panose="020B0503020204020204" charset="-122"/>
                 <a:ea typeface="微软雅黑" panose="020B0503020204020204" charset="-122"/>
               </a:rPr>
-              <a:t>系统的数据流如下：任务描述和模块接口</a:t>
+              <a:t>图中展示了本研究实现的</a:t>
             </a:r>
             <a:r>
               <a:rPr lang="en-US" altLang="zh-CN" sz="1600" dirty="0">
                 <a:latin typeface="微软雅黑" panose="020B0503020204020204" charset="-122"/>
                 <a:ea typeface="微软雅黑" panose="020B0503020204020204" charset="-122"/>
               </a:rPr>
-              <a:t> -&gt; </a:t>
+              <a:t> AutoChip </a:t>
             </a:r>
             <a:r>
               <a:rPr lang="zh-CN" altLang="en-US" sz="1600" dirty="0">
                 <a:latin typeface="微软雅黑" panose="020B0503020204020204" charset="-122"/>
                 <a:ea typeface="微软雅黑" panose="020B0503020204020204" charset="-122"/>
               </a:rPr>
-              <a:t>提示词构建</a:t>
+              <a:t>风格</a:t>
             </a:r>
             <a:r>
               <a:rPr lang="en-US" altLang="zh-CN" sz="1600" dirty="0">
                 <a:latin typeface="微软雅黑" panose="020B0503020204020204" charset="-122"/>
                 <a:ea typeface="微软雅黑" panose="020B0503020204020204" charset="-122"/>
               </a:rPr>
-              <a:t> -&gt; LLM </a:t>
+              <a:t> RTL </a:t>
+            </a:r>
+            <a:r>
+              <a:rPr sz="1600" dirty="0">
+                <a:latin typeface="微软雅黑" panose="020B0503020204020204" charset="-122"/>
+                <a:ea typeface="微软雅黑" panose="020B0503020204020204" charset="-122"/>
+              </a:rPr>
+              <a:t>生成与优化</a:t>
             </a:r>
             <a:r>
               <a:rPr lang="zh-CN" altLang="en-US" sz="1600" dirty="0">
                 <a:latin typeface="微软雅黑" panose="020B0503020204020204" charset="-122"/>
                 <a:ea typeface="微软雅黑" panose="020B0503020204020204" charset="-122"/>
               </a:rPr>
-              <a:t>生成</a:t>
-            </a:r>
-            <a:r>
-              <a:rPr lang="en-US" altLang="zh-CN" sz="1600" dirty="0">
-                <a:latin typeface="微软雅黑" panose="020B0503020204020204" charset="-122"/>
-                <a:ea typeface="微软雅黑" panose="020B0503020204020204" charset="-122"/>
-              </a:rPr>
-              <a:t> -&gt; Verilog </a:t>
-            </a:r>
-            <a:r>
-              <a:rPr lang="zh-CN" altLang="en-US" sz="1600" dirty="0">
-                <a:latin typeface="微软雅黑" panose="020B0503020204020204" charset="-122"/>
-                <a:ea typeface="微软雅黑" panose="020B0503020204020204" charset="-122"/>
-              </a:rPr>
-              <a:t>提取</a:t>
-            </a:r>
-            <a:r>
-              <a:rPr lang="en-US" altLang="zh-CN" sz="1600" dirty="0">
-                <a:latin typeface="微软雅黑" panose="020B0503020204020204" charset="-122"/>
-                <a:ea typeface="微软雅黑" panose="020B0503020204020204" charset="-122"/>
-              </a:rPr>
-              <a:t> -&gt; iverilog </a:t>
-            </a:r>
-            <a:r>
-              <a:rPr lang="zh-CN" altLang="en-US" sz="1600" dirty="0">
-                <a:latin typeface="微软雅黑" panose="020B0503020204020204" charset="-122"/>
-                <a:ea typeface="微软雅黑" panose="020B0503020204020204" charset="-122"/>
-              </a:rPr>
-              <a:t>编译</a:t>
-            </a:r>
-            <a:r>
-              <a:rPr lang="en-US" altLang="zh-CN" sz="1600" dirty="0">
-                <a:latin typeface="微软雅黑" panose="020B0503020204020204" charset="-122"/>
-                <a:ea typeface="微软雅黑" panose="020B0503020204020204" charset="-122"/>
-              </a:rPr>
-              <a:t> -&gt; vvp </a:t>
-            </a:r>
-            <a:r>
-              <a:rPr lang="zh-CN" altLang="en-US" sz="1600" dirty="0">
-                <a:latin typeface="微软雅黑" panose="020B0503020204020204" charset="-122"/>
-                <a:ea typeface="微软雅黑" panose="020B0503020204020204" charset="-122"/>
-              </a:rPr>
-              <a:t>仿真</a:t>
-            </a:r>
-            <a:r>
-              <a:rPr lang="en-US" altLang="zh-CN" sz="1600" dirty="0">
-                <a:latin typeface="微软雅黑" panose="020B0503020204020204" charset="-122"/>
-                <a:ea typeface="微软雅黑" panose="020B0503020204020204" charset="-122"/>
-              </a:rPr>
-              <a:t> -&gt; </a:t>
-            </a:r>
-            <a:r>
-              <a:rPr lang="zh-CN" altLang="en-US" sz="1600" dirty="0">
-                <a:latin typeface="微软雅黑" panose="020B0503020204020204" charset="-122"/>
-                <a:ea typeface="微软雅黑" panose="020B0503020204020204" charset="-122"/>
-              </a:rPr>
-              <a:t>评分排名</a:t>
-            </a:r>
-            <a:r>
-              <a:rPr lang="en-US" altLang="zh-CN" sz="1600" dirty="0">
-                <a:latin typeface="微软雅黑" panose="020B0503020204020204" charset="-122"/>
-                <a:ea typeface="微软雅黑" panose="020B0503020204020204" charset="-122"/>
-              </a:rPr>
-              <a:t> -&gt;</a:t>
-            </a:r>
-            <a:r>
-              <a:rPr lang="zh-CN" altLang="en-US" sz="1600" dirty="0">
-                <a:latin typeface="微软雅黑" panose="020B0503020204020204" charset="-122"/>
-                <a:ea typeface="微软雅黑" panose="020B0503020204020204" charset="-122"/>
-              </a:rPr>
-              <a:t>（若未通过）构建反馈提示词</a:t>
-            </a:r>
-            <a:r>
-              <a:rPr lang="en-US" altLang="zh-CN" sz="1600" dirty="0">
-                <a:latin typeface="微软雅黑" panose="020B0503020204020204" charset="-122"/>
-                <a:ea typeface="微软雅黑" panose="020B0503020204020204" charset="-122"/>
-              </a:rPr>
-              <a:t> -&gt; </a:t>
-            </a:r>
-            <a:r>
-              <a:rPr lang="zh-CN" altLang="en-US" sz="1600" dirty="0">
-                <a:latin typeface="微软雅黑" panose="020B0503020204020204" charset="-122"/>
-                <a:ea typeface="微软雅黑" panose="020B0503020204020204" charset="-122"/>
-              </a:rPr>
-              <a:t>返回</a:t>
-            </a:r>
-            <a:r>
-              <a:rPr lang="en-US" altLang="zh-CN" sz="1600" dirty="0">
-                <a:latin typeface="微软雅黑" panose="020B0503020204020204" charset="-122"/>
-                <a:ea typeface="微软雅黑" panose="020B0503020204020204" charset="-122"/>
-              </a:rPr>
-              <a:t> LLM </a:t>
-            </a:r>
-            <a:r>
-              <a:rPr lang="zh-CN" altLang="en-US" sz="1600" dirty="0">
-                <a:latin typeface="微软雅黑" panose="020B0503020204020204" charset="-122"/>
-                <a:ea typeface="微软雅黑" panose="020B0503020204020204" charset="-122"/>
-              </a:rPr>
-              <a:t>生成步骤。整个流程形成一个闭环，每次迭代都利用上一轮的错误信息来指导代码修复。</a:t>
+              <a:t>的总体架构。</a:t>
             </a:r>
             <a:endParaRPr lang="zh-CN" altLang="en-US" sz="1600" dirty="0">
               <a:latin typeface="微软雅黑" panose="020B0503020204020204" charset="-122"/>
@@ -40472,7 +40687,7 @@
       </p:sp>
       <p:pic>
         <p:nvPicPr>
-          <p:cNvPr id="6" name="图片 3" descr="mermaid-diagram (1)"/>
+          <p:cNvPr id="3" name="图片 5" descr="fig_system_architecture"/>
           <p:cNvPicPr>
             <a:picLocks noChangeAspect="1"/>
           </p:cNvPicPr>
@@ -40486,8 +40701,8 @@
         </p:blipFill>
         <p:spPr>
           <a:xfrm>
-            <a:off x="8474075" y="1287145"/>
-            <a:ext cx="2703195" cy="5015230"/>
+            <a:off x="5169535" y="1082040"/>
+            <a:ext cx="6920865" cy="4304030"/>
           </a:xfrm>
           <a:prstGeom prst="rect">
             <a:avLst/>
@@ -40913,6 +41128,30 @@
           </a:p>
         </p:txBody>
       </p:sp>
+      <p:pic>
+        <p:nvPicPr>
+          <p:cNvPr id="8" name="图片 8" descr="tab_experiment_config"/>
+          <p:cNvPicPr>
+            <a:picLocks noChangeAspect="1"/>
+          </p:cNvPicPr>
+          <p:nvPr/>
+        </p:nvPicPr>
+        <p:blipFill>
+          <a:blip r:embed="rId1"/>
+          <a:stretch>
+            <a:fillRect/>
+          </a:stretch>
+        </p:blipFill>
+        <p:spPr>
+          <a:xfrm>
+            <a:off x="2676843" y="4028758"/>
+            <a:ext cx="5193665" cy="2828925"/>
+          </a:xfrm>
+          <a:prstGeom prst="rect">
+            <a:avLst/>
+          </a:prstGeom>
+        </p:spPr>
+      </p:pic>
     </p:spTree>
   </p:cSld>
   <p:clrMapOvr>
